--- a/modules/M1-understanding/M1-understanding.pptx
+++ b/modules/M1-understanding/M1-understanding.pptx
@@ -13250,7 +13250,7 @@
           <a:p>
             <a:r>
               <a:rPr dirty="0"/>
-              <a:t>Lab 1: ~60 Minutes</a:t>
+              <a:t>Lab 1: ~50 Minutes</a:t>
             </a:r>
           </a:p>
         </p:txBody>

--- a/modules/M1-understanding/M1-understanding.pptx
+++ b/modules/M1-understanding/M1-understanding.pptx
@@ -1838,7 +1838,7 @@
           <a:lstStyle/>
           <a:p>
             <a:r>
-              <a:t>~10 min · </a:t>
+              <a:t>~6 min · </a:t>
             </a:r>
             <a:r>
               <a:rPr>
@@ -2363,7 +2363,7 @@
           <a:lstStyle/>
           <a:p>
             <a:r>
-              <a:t>~10 min · </a:t>
+              <a:t>~6 min · </a:t>
             </a:r>
             <a:r>
               <a:rPr>
@@ -3278,7 +3278,7 @@
           <a:lstStyle/>
           <a:p>
             <a:r>
-              <a:t>~8 min · </a:t>
+              <a:t>~6 min · </a:t>
             </a:r>
             <a:r>
               <a:rPr>
